--- a/PPT/dollarama_updated.pptx
+++ b/PPT/dollarama_updated.pptx
@@ -3200,7 +3200,7 @@
         </p:nvSpPr>
         <p:spPr>
           <a:xfrm>
-            <a:off x="310896" y="2633472"/>
+            <a:off x="310896" y="2719196"/>
             <a:ext cx="1005840" cy="182880"/>
           </a:xfrm>
           <a:prstGeom prst="rect">
@@ -5456,7 +5456,7 @@
               <a:buNone/>
             </a:pPr>
             <a:r>
-              <a:rPr lang="en-US" sz="2400" b="1" dirty="0">
+              <a:rPr lang="en-US" sz="2000" b="1" dirty="0">
                 <a:solidFill>
                   <a:srgbClr val="1D3557"/>
                 </a:solidFill>
@@ -5466,7 +5466,7 @@
               </a:rPr>
               <a:t>ROIC ~30% vs WACC 9% — Value Creation Every Year</a:t>
             </a:r>
-            <a:endParaRPr lang="en-US" sz="2400" dirty="0"/>
+            <a:endParaRPr lang="en-US" sz="2000" dirty="0"/>
           </a:p>
         </p:txBody>
       </p:sp>
@@ -8595,7 +8595,7 @@
               <a:buNone/>
             </a:pPr>
             <a:r>
-              <a:rPr lang="en-US" sz="2400" b="1" dirty="0">
+              <a:rPr lang="en-US" sz="2000" b="1" dirty="0">
                 <a:solidFill>
                   <a:srgbClr val="1D3557"/>
                 </a:solidFill>
@@ -8605,7 +8605,7 @@
               </a:rPr>
               <a:t>Intrinsic Value $212 — Quality Justifies the Premium</a:t>
             </a:r>
-            <a:endParaRPr lang="en-US" sz="2400" dirty="0"/>
+            <a:endParaRPr lang="en-US" sz="2000" dirty="0"/>
           </a:p>
         </p:txBody>
       </p:sp>
@@ -12111,7 +12111,7 @@
         <p:spPr>
           <a:xfrm>
             <a:off x="6126480" y="4480560"/>
-            <a:ext cx="2688336" cy="402336"/>
+            <a:ext cx="2688336" cy="571500"/>
           </a:xfrm>
           <a:prstGeom prst="rect">
             <a:avLst/>
@@ -12127,28 +12127,28 @@
               <a:buNone/>
             </a:pPr>
             <a:r>
-              <a:rPr lang="en-US" sz="800" dirty="0">
+              <a:rPr lang="en-US" sz="900" dirty="0">
                 <a:solidFill>
                   <a:srgbClr val="5A6472"/>
                 </a:solidFill>
               </a:rPr>
               <a:t>Median outcome: ~$212  |  Prob. above current price: &gt;80% under base assumptions</a:t>
             </a:r>
-            <a:endParaRPr lang="en-US" sz="800" dirty="0"/>
+            <a:endParaRPr lang="en-US" sz="900" dirty="0"/>
           </a:p>
           <a:p>
             <a:pPr marL="0" indent="0">
               <a:buNone/>
             </a:pPr>
             <a:r>
-              <a:rPr lang="en-US" sz="800" dirty="0">
+              <a:rPr lang="en-US" sz="900" dirty="0">
                 <a:solidFill>
                   <a:srgbClr val="5A6472"/>
                 </a:solidFill>
               </a:rPr>
               <a:t>Note: probability estimates are model-dependent and sensitive to margin recovery timeline.</a:t>
             </a:r>
-            <a:endParaRPr lang="en-US" sz="800" dirty="0"/>
+            <a:endParaRPr lang="en-US" sz="900" dirty="0"/>
           </a:p>
         </p:txBody>
       </p:sp>
@@ -12229,7 +12229,7 @@
         <p:spPr>
           <a:xfrm>
             <a:off x="3383280" y="4425696"/>
-            <a:ext cx="2340864" cy="365760"/>
+            <a:ext cx="2340864" cy="626364"/>
           </a:xfrm>
           <a:prstGeom prst="rect">
             <a:avLst/>
@@ -12245,28 +12245,28 @@
               <a:buNone/>
             </a:pPr>
             <a:r>
-              <a:rPr lang="en-US" sz="900" i="1" dirty="0">
+              <a:rPr lang="en-US" sz="1050" i="1" dirty="0">
                 <a:solidFill>
                   <a:srgbClr val="FFCCCC"/>
                 </a:solidFill>
               </a:rPr>
               <a:t>Switch to the Streamlit dashboard:</a:t>
             </a:r>
-            <a:endParaRPr lang="en-US" sz="900" dirty="0"/>
+            <a:endParaRPr lang="en-US" sz="1050" dirty="0"/>
           </a:p>
           <a:p>
             <a:pPr marL="0" indent="0">
               <a:buNone/>
             </a:pPr>
             <a:r>
-              <a:rPr lang="en-US" sz="900" i="1" dirty="0">
+              <a:rPr lang="en-US" sz="1050" i="1" dirty="0">
                 <a:solidFill>
                   <a:srgbClr val="FFCCCC"/>
                 </a:solidFill>
               </a:rPr>
               <a:t>Tab 08 (DCF sliders) + Tab 09 (Monte Carlo)</a:t>
             </a:r>
-            <a:endParaRPr lang="en-US" sz="900" dirty="0"/>
+            <a:endParaRPr lang="en-US" sz="1050" dirty="0"/>
           </a:p>
         </p:txBody>
       </p:sp>
@@ -12733,14 +12733,14 @@
               <a:buNone/>
             </a:pPr>
             <a:r>
-              <a:rPr lang="en-US" sz="850" dirty="0">
+              <a:rPr lang="en-US" sz="1000" dirty="0">
                 <a:solidFill>
                   <a:srgbClr val="5A6472"/>
                 </a:solidFill>
               </a:rPr>
               <a:t>FY2026 EBITDA margin -170bps from Australian mix dilution. Our model assumes gradual recovery through 2027. If the drag extends beyond that, our DCF assumptions are too optimistic. Most important variable to track in the next two earnings releases.</a:t>
             </a:r>
-            <a:endParaRPr lang="en-US" sz="850" dirty="0"/>
+            <a:endParaRPr lang="en-US" sz="1000" dirty="0"/>
           </a:p>
         </p:txBody>
       </p:sp>
@@ -12869,14 +12869,14 @@
               <a:buNone/>
             </a:pPr>
             <a:r>
-              <a:rPr lang="en-US" sz="850" dirty="0">
+              <a:rPr lang="en-US" sz="1050" dirty="0">
                 <a:solidFill>
                   <a:srgbClr val="5A6472"/>
                 </a:solidFill>
               </a:rPr>
               <a:t>CEO (March 2026): price increases only where 'absolutely necessary.' The $5.00 CAD price ceiling limits pass-through ability. A sustained China sourcing or tariff shock compresses margins directly with no easy offset.</a:t>
             </a:r>
-            <a:endParaRPr lang="en-US" sz="850" dirty="0"/>
+            <a:endParaRPr lang="en-US" sz="1050" dirty="0"/>
           </a:p>
         </p:txBody>
       </p:sp>
@@ -15511,8 +15511,8 @@
         </p:nvSpPr>
         <p:spPr>
           <a:xfrm>
-            <a:off x="4700016" y="4114800"/>
-            <a:ext cx="4114800" cy="274320"/>
+            <a:off x="4700015" y="4384547"/>
+            <a:ext cx="4114800" cy="516635"/>
           </a:xfrm>
           <a:prstGeom prst="rect">
             <a:avLst/>
@@ -15632,14 +15632,14 @@
               <a:buNone/>
             </a:pPr>
             <a:r>
-              <a:rPr lang="en-US" sz="850" dirty="0">
+              <a:rPr lang="en-US" sz="1000" dirty="0">
                 <a:solidFill>
                   <a:srgbClr val="A8C4DC"/>
                 </a:solidFill>
               </a:rPr>
               <a:t>The domestic model has been consistent for 15 years. Risk is concentrated in international execution — Reject Shop integration speed and COGS trajectory.</a:t>
             </a:r>
-            <a:endParaRPr lang="en-US" sz="850" dirty="0"/>
+            <a:endParaRPr lang="en-US" sz="1000" dirty="0"/>
           </a:p>
         </p:txBody>
       </p:sp>

--- a/PPT/dollarama_updated.pptx
+++ b/PPT/dollarama_updated.pptx
@@ -117,12 +117,237 @@
 </p:presentation>
 </file>
 
+<file path=ppt/revisionInfo.xml><?xml version="1.0" encoding="utf-8"?>
+<p1510:revInfo xmlns:a="http://schemas.openxmlformats.org/drawingml/2006/main" xmlns:r="http://schemas.openxmlformats.org/officeDocument/2006/relationships" xmlns:p1510="http://schemas.microsoft.com/office/powerpoint/2015/10/main">
+  <p1510:revLst>
+    <p1510:client id="{3B12847F-45CF-4148-AE3E-D832FE59E89E}" v="2" dt="2026-04-06T16:23:50.057"/>
+  </p1510:revLst>
+</p1510:revInfo>
+</file>
+
+<file path=ppt/changesInfos/changesInfo1.xml><?xml version="1.0" encoding="utf-8"?>
+<pc:chgInfo xmlns:a="http://schemas.openxmlformats.org/drawingml/2006/main" xmlns:r="http://schemas.openxmlformats.org/officeDocument/2006/relationships" xmlns:ac="http://schemas.microsoft.com/office/drawing/2013/main/command" xmlns:pc="http://schemas.microsoft.com/office/powerpoint/2013/main/command">
+  <pc:docChgLst>
+    <pc:chgData name="K Soni" userId="6458cc8908d7934f" providerId="LiveId" clId="{49024862-22CB-46EE-AB12-8E24C00757DA}"/>
+    <pc:docChg chg="undo custSel modSld">
+      <pc:chgData name="K Soni" userId="6458cc8908d7934f" providerId="LiveId" clId="{49024862-22CB-46EE-AB12-8E24C00757DA}" dt="2026-04-06T16:25:07.579" v="198" actId="20577"/>
+      <pc:docMkLst>
+        <pc:docMk/>
+      </pc:docMkLst>
+      <pc:sldChg chg="addSp delSp modSp mod">
+        <pc:chgData name="K Soni" userId="6458cc8908d7934f" providerId="LiveId" clId="{49024862-22CB-46EE-AB12-8E24C00757DA}" dt="2026-04-06T16:23:58.179" v="194" actId="1076"/>
+        <pc:sldMkLst>
+          <pc:docMk/>
+          <pc:sldMk cId="0" sldId="258"/>
+        </pc:sldMkLst>
+        <pc:spChg chg="mod">
+          <ac:chgData name="K Soni" userId="6458cc8908d7934f" providerId="LiveId" clId="{49024862-22CB-46EE-AB12-8E24C00757DA}" dt="2026-04-06T16:20:44.333" v="132" actId="20577"/>
+          <ac:spMkLst>
+            <pc:docMk/>
+            <pc:sldMk cId="0" sldId="258"/>
+            <ac:spMk id="35" creationId="{00000000-0000-0000-0000-000000000000}"/>
+          </ac:spMkLst>
+        </pc:spChg>
+        <pc:spChg chg="mod">
+          <ac:chgData name="K Soni" userId="6458cc8908d7934f" providerId="LiveId" clId="{49024862-22CB-46EE-AB12-8E24C00757DA}" dt="2026-04-06T16:20:51.399" v="134" actId="20577"/>
+          <ac:spMkLst>
+            <pc:docMk/>
+            <pc:sldMk cId="0" sldId="258"/>
+            <ac:spMk id="84" creationId="{00000000-0000-0000-0000-000000000000}"/>
+          </ac:spMkLst>
+        </pc:spChg>
+        <pc:spChg chg="mod">
+          <ac:chgData name="K Soni" userId="6458cc8908d7934f" providerId="LiveId" clId="{49024862-22CB-46EE-AB12-8E24C00757DA}" dt="2026-04-06T16:21:06.952" v="136" actId="14100"/>
+          <ac:spMkLst>
+            <pc:docMk/>
+            <pc:sldMk cId="0" sldId="258"/>
+            <ac:spMk id="89" creationId="{00000000-0000-0000-0000-000000000000}"/>
+          </ac:spMkLst>
+        </pc:spChg>
+        <pc:spChg chg="mod">
+          <ac:chgData name="K Soni" userId="6458cc8908d7934f" providerId="LiveId" clId="{49024862-22CB-46EE-AB12-8E24C00757DA}" dt="2026-04-06T16:22:41.898" v="190" actId="20577"/>
+          <ac:spMkLst>
+            <pc:docMk/>
+            <pc:sldMk cId="0" sldId="258"/>
+            <ac:spMk id="90" creationId="{00000000-0000-0000-0000-000000000000}"/>
+          </ac:spMkLst>
+        </pc:spChg>
+        <pc:graphicFrameChg chg="add mod">
+          <ac:chgData name="K Soni" userId="6458cc8908d7934f" providerId="LiveId" clId="{49024862-22CB-46EE-AB12-8E24C00757DA}" dt="2026-04-06T16:23:58.179" v="194" actId="1076"/>
+          <ac:graphicFrameMkLst>
+            <pc:docMk/>
+            <pc:sldMk cId="0" sldId="258"/>
+            <ac:graphicFrameMk id="9" creationId="{60F198D5-7CD5-6E25-1ED3-8FFC61A8ED2E}"/>
+          </ac:graphicFrameMkLst>
+        </pc:graphicFrameChg>
+        <pc:graphicFrameChg chg="del">
+          <ac:chgData name="K Soni" userId="6458cc8908d7934f" providerId="LiveId" clId="{49024862-22CB-46EE-AB12-8E24C00757DA}" dt="2026-04-06T16:23:45.968" v="192" actId="21"/>
+          <ac:graphicFrameMkLst>
+            <pc:docMk/>
+            <pc:sldMk cId="0" sldId="258"/>
+            <ac:graphicFrameMk id="37" creationId="{00000000-0000-0000-0000-000000000000}"/>
+          </ac:graphicFrameMkLst>
+        </pc:graphicFrameChg>
+      </pc:sldChg>
+      <pc:sldChg chg="modSp mod">
+        <pc:chgData name="K Soni" userId="6458cc8908d7934f" providerId="LiveId" clId="{49024862-22CB-46EE-AB12-8E24C00757DA}" dt="2026-04-06T16:25:07.579" v="198" actId="20577"/>
+        <pc:sldMkLst>
+          <pc:docMk/>
+          <pc:sldMk cId="0" sldId="259"/>
+        </pc:sldMkLst>
+        <pc:spChg chg="mod">
+          <ac:chgData name="K Soni" userId="6458cc8908d7934f" providerId="LiveId" clId="{49024862-22CB-46EE-AB12-8E24C00757DA}" dt="2026-04-06T16:13:45.208" v="3" actId="20577"/>
+          <ac:spMkLst>
+            <pc:docMk/>
+            <pc:sldMk cId="0" sldId="259"/>
+            <ac:spMk id="20" creationId="{00000000-0000-0000-0000-000000000000}"/>
+          </ac:spMkLst>
+        </pc:spChg>
+        <pc:spChg chg="mod">
+          <ac:chgData name="K Soni" userId="6458cc8908d7934f" providerId="LiveId" clId="{49024862-22CB-46EE-AB12-8E24C00757DA}" dt="2026-04-06T16:14:47.910" v="12" actId="1076"/>
+          <ac:spMkLst>
+            <pc:docMk/>
+            <pc:sldMk cId="0" sldId="259"/>
+            <ac:spMk id="37" creationId="{00000000-0000-0000-0000-000000000000}"/>
+          </ac:spMkLst>
+        </pc:spChg>
+        <pc:spChg chg="mod">
+          <ac:chgData name="K Soni" userId="6458cc8908d7934f" providerId="LiveId" clId="{49024862-22CB-46EE-AB12-8E24C00757DA}" dt="2026-04-06T16:14:53.256" v="13" actId="1076"/>
+          <ac:spMkLst>
+            <pc:docMk/>
+            <pc:sldMk cId="0" sldId="259"/>
+            <ac:spMk id="39" creationId="{00000000-0000-0000-0000-000000000000}"/>
+          </ac:spMkLst>
+        </pc:spChg>
+        <pc:spChg chg="mod">
+          <ac:chgData name="K Soni" userId="6458cc8908d7934f" providerId="LiveId" clId="{49024862-22CB-46EE-AB12-8E24C00757DA}" dt="2026-04-06T16:15:00.713" v="15" actId="403"/>
+          <ac:spMkLst>
+            <pc:docMk/>
+            <pc:sldMk cId="0" sldId="259"/>
+            <ac:spMk id="40" creationId="{00000000-0000-0000-0000-000000000000}"/>
+          </ac:spMkLst>
+        </pc:spChg>
+        <pc:spChg chg="mod">
+          <ac:chgData name="K Soni" userId="6458cc8908d7934f" providerId="LiveId" clId="{49024862-22CB-46EE-AB12-8E24C00757DA}" dt="2026-04-06T16:25:07.579" v="198" actId="20577"/>
+          <ac:spMkLst>
+            <pc:docMk/>
+            <pc:sldMk cId="0" sldId="259"/>
+            <ac:spMk id="109" creationId="{00000000-0000-0000-0000-000000000000}"/>
+          </ac:spMkLst>
+        </pc:spChg>
+      </pc:sldChg>
+      <pc:sldChg chg="modSp mod">
+        <pc:chgData name="K Soni" userId="6458cc8908d7934f" providerId="LiveId" clId="{49024862-22CB-46EE-AB12-8E24C00757DA}" dt="2026-04-06T16:19:43.759" v="48" actId="20577"/>
+        <pc:sldMkLst>
+          <pc:docMk/>
+          <pc:sldMk cId="0" sldId="260"/>
+        </pc:sldMkLst>
+        <pc:spChg chg="mod">
+          <ac:chgData name="K Soni" userId="6458cc8908d7934f" providerId="LiveId" clId="{49024862-22CB-46EE-AB12-8E24C00757DA}" dt="2026-04-06T16:16:55.880" v="30" actId="14100"/>
+          <ac:spMkLst>
+            <pc:docMk/>
+            <pc:sldMk cId="0" sldId="260"/>
+            <ac:spMk id="20" creationId="{00000000-0000-0000-0000-000000000000}"/>
+          </ac:spMkLst>
+        </pc:spChg>
+        <pc:spChg chg="mod">
+          <ac:chgData name="K Soni" userId="6458cc8908d7934f" providerId="LiveId" clId="{49024862-22CB-46EE-AB12-8E24C00757DA}" dt="2026-04-06T16:16:35.107" v="27" actId="14100"/>
+          <ac:spMkLst>
+            <pc:docMk/>
+            <pc:sldMk cId="0" sldId="260"/>
+            <ac:spMk id="21" creationId="{00000000-0000-0000-0000-000000000000}"/>
+          </ac:spMkLst>
+        </pc:spChg>
+        <pc:spChg chg="mod">
+          <ac:chgData name="K Soni" userId="6458cc8908d7934f" providerId="LiveId" clId="{49024862-22CB-46EE-AB12-8E24C00757DA}" dt="2026-04-06T16:15:50.856" v="23" actId="1076"/>
+          <ac:spMkLst>
+            <pc:docMk/>
+            <pc:sldMk cId="0" sldId="260"/>
+            <ac:spMk id="23" creationId="{00000000-0000-0000-0000-000000000000}"/>
+          </ac:spMkLst>
+        </pc:spChg>
+        <pc:spChg chg="mod">
+          <ac:chgData name="K Soni" userId="6458cc8908d7934f" providerId="LiveId" clId="{49024862-22CB-46EE-AB12-8E24C00757DA}" dt="2026-04-06T16:18:06.903" v="35" actId="20577"/>
+          <ac:spMkLst>
+            <pc:docMk/>
+            <pc:sldMk cId="0" sldId="260"/>
+            <ac:spMk id="62" creationId="{00000000-0000-0000-0000-000000000000}"/>
+          </ac:spMkLst>
+        </pc:spChg>
+        <pc:spChg chg="mod">
+          <ac:chgData name="K Soni" userId="6458cc8908d7934f" providerId="LiveId" clId="{49024862-22CB-46EE-AB12-8E24C00757DA}" dt="2026-04-06T16:18:16.935" v="37" actId="20577"/>
+          <ac:spMkLst>
+            <pc:docMk/>
+            <pc:sldMk cId="0" sldId="260"/>
+            <ac:spMk id="72" creationId="{00000000-0000-0000-0000-000000000000}"/>
+          </ac:spMkLst>
+        </pc:spChg>
+        <pc:spChg chg="mod">
+          <ac:chgData name="K Soni" userId="6458cc8908d7934f" providerId="LiveId" clId="{49024862-22CB-46EE-AB12-8E24C00757DA}" dt="2026-04-06T16:18:31.451" v="43" actId="20577"/>
+          <ac:spMkLst>
+            <pc:docMk/>
+            <pc:sldMk cId="0" sldId="260"/>
+            <ac:spMk id="82" creationId="{00000000-0000-0000-0000-000000000000}"/>
+          </ac:spMkLst>
+        </pc:spChg>
+        <pc:spChg chg="mod">
+          <ac:chgData name="K Soni" userId="6458cc8908d7934f" providerId="LiveId" clId="{49024862-22CB-46EE-AB12-8E24C00757DA}" dt="2026-04-06T16:19:43.759" v="48" actId="20577"/>
+          <ac:spMkLst>
+            <pc:docMk/>
+            <pc:sldMk cId="0" sldId="260"/>
+            <ac:spMk id="92" creationId="{00000000-0000-0000-0000-000000000000}"/>
+          </ac:spMkLst>
+        </pc:spChg>
+        <pc:spChg chg="mod">
+          <ac:chgData name="K Soni" userId="6458cc8908d7934f" providerId="LiveId" clId="{49024862-22CB-46EE-AB12-8E24C00757DA}" dt="2026-04-06T16:17:00.636" v="31" actId="14100"/>
+          <ac:spMkLst>
+            <pc:docMk/>
+            <pc:sldMk cId="0" sldId="260"/>
+            <ac:spMk id="98" creationId="{00000000-0000-0000-0000-000000000000}"/>
+          </ac:spMkLst>
+        </pc:spChg>
+      </pc:sldChg>
+      <pc:sldChg chg="modSp mod">
+        <pc:chgData name="K Soni" userId="6458cc8908d7934f" providerId="LiveId" clId="{49024862-22CB-46EE-AB12-8E24C00757DA}" dt="2026-04-06T16:20:13.559" v="130" actId="20577"/>
+        <pc:sldMkLst>
+          <pc:docMk/>
+          <pc:sldMk cId="0" sldId="261"/>
+        </pc:sldMkLst>
+        <pc:spChg chg="mod">
+          <ac:chgData name="K Soni" userId="6458cc8908d7934f" providerId="LiveId" clId="{49024862-22CB-46EE-AB12-8E24C00757DA}" dt="2026-04-06T16:20:04.232" v="62" actId="20577"/>
+          <ac:spMkLst>
+            <pc:docMk/>
+            <pc:sldMk cId="0" sldId="261"/>
+            <ac:spMk id="23" creationId="{00000000-0000-0000-0000-000000000000}"/>
+          </ac:spMkLst>
+        </pc:spChg>
+        <pc:spChg chg="mod">
+          <ac:chgData name="K Soni" userId="6458cc8908d7934f" providerId="LiveId" clId="{49024862-22CB-46EE-AB12-8E24C00757DA}" dt="2026-04-06T16:20:13.559" v="130" actId="20577"/>
+          <ac:spMkLst>
+            <pc:docMk/>
+            <pc:sldMk cId="0" sldId="261"/>
+            <ac:spMk id="24" creationId="{00000000-0000-0000-0000-000000000000}"/>
+          </ac:spMkLst>
+        </pc:spChg>
+      </pc:sldChg>
+    </pc:docChg>
+  </pc:docChgLst>
+</pc:chgInfo>
+</file>
+
 <file path=ppt/charts/chart1.xml><?xml version="1.0" encoding="utf-8"?>
 <c:chartSpace xmlns:c="http://schemas.openxmlformats.org/drawingml/2006/chart" xmlns:a="http://schemas.openxmlformats.org/drawingml/2006/main" xmlns:r="http://schemas.openxmlformats.org/officeDocument/2006/relationships" xmlns:c16r2="http://schemas.microsoft.com/office/drawing/2015/06/chart">
   <c:date1904 val="0"/>
   <c:lang val="en-US"/>
   <c:roundedCorners val="0"/>
-  <c:style val="2"/>
+  <mc:AlternateContent xmlns:mc="http://schemas.openxmlformats.org/markup-compatibility/2006">
+    <mc:Choice xmlns:c14="http://schemas.microsoft.com/office/drawing/2007/8/2/chart" Requires="c14">
+      <c14:style val="102"/>
+    </mc:Choice>
+    <mc:Fallback>
+      <c:style val="2"/>
+    </mc:Fallback>
+  </mc:AlternateContent>
   <c:chart>
     <c:title>
       <c:tx>
@@ -154,7 +379,17 @@
     </c:title>
     <c:autoTitleDeleted val="0"/>
     <c:plotArea>
-      <c:layout/>
+      <c:layout>
+        <c:manualLayout>
+          <c:layoutTarget val="inner"/>
+          <c:xMode val="edge"/>
+          <c:yMode val="edge"/>
+          <c:x val="7.2536210751433849E-2"/>
+          <c:y val="0.16206239618598398"/>
+          <c:w val="0.89351317196461555"/>
+          <c:h val="0.59226173494617518"/>
+        </c:manualLayout>
+      </c:layout>
       <c:barChart>
         <c:barDir val="col"/>
         <c:grouping val="clustered"/>
@@ -198,7 +433,7 @@
                   <c:v>FY2025</c:v>
                 </c:pt>
                 <c:pt idx="4">
-                  <c:v>FY2026E</c:v>
+                  <c:v>FY2026A</c:v>
                 </c:pt>
               </c:strCache>
             </c:strRef>
@@ -229,7 +464,7 @@
           </c:val>
           <c:extLst>
             <c:ext xmlns:c16="http://schemas.microsoft.com/office/drawing/2014/chart" uri="{C3380CC4-5D6E-409C-BE32-E72D297353CC}">
-              <c16:uniqueId val="{00000000-69E4-4945-ABB1-DD164BAFF904}"/>
+              <c16:uniqueId val="{00000000-CF28-4AF6-A13D-682BF114CFA2}"/>
             </c:ext>
           </c:extLst>
         </c:ser>
@@ -272,7 +507,7 @@
                   <c:v>FY2025</c:v>
                 </c:pt>
                 <c:pt idx="4">
-                  <c:v>FY2026E</c:v>
+                  <c:v>FY2026A</c:v>
                 </c:pt>
               </c:strCache>
             </c:strRef>
@@ -296,14 +531,14 @@
                   <c:v>2.15</c:v>
                 </c:pt>
                 <c:pt idx="4">
-                  <c:v>2.39</c:v>
+                  <c:v>2.41</c:v>
                 </c:pt>
               </c:numCache>
             </c:numRef>
           </c:val>
           <c:extLst>
             <c:ext xmlns:c16="http://schemas.microsoft.com/office/drawing/2014/chart" uri="{C3380CC4-5D6E-409C-BE32-E72D297353CC}">
-              <c16:uniqueId val="{00000001-69E4-4945-ABB1-DD164BAFF904}"/>
+              <c16:uniqueId val="{00000001-CF28-4AF6-A13D-682BF114CFA2}"/>
             </c:ext>
           </c:extLst>
         </c:ser>
@@ -6432,7 +6667,7 @@
                 <a:ea typeface="Georgia" pitchFamily="34" charset="-122"/>
                 <a:cs typeface="Georgia" pitchFamily="34" charset="-120"/>
               </a:rPr>
-              <a:t>1.1x</a:t>
+              <a:t>1.0x</a:t>
             </a:r>
             <a:endParaRPr lang="en-US" sz="2000" dirty="0"/>
           </a:p>
@@ -6474,22 +6709,6 @@
           </a:p>
         </p:txBody>
       </p:sp>
-      <p:graphicFrame>
-        <p:nvGraphicFramePr>
-          <p:cNvPr id="37" name="Chart 0"/>
-          <p:cNvGraphicFramePr/>
-          <p:nvPr/>
-        </p:nvGraphicFramePr>
-        <p:xfrm>
-          <a:off x="201168" y="1920240"/>
-          <a:ext cx="4114800" cy="2523744"/>
-        </p:xfrm>
-        <a:graphic>
-          <a:graphicData uri="http://schemas.openxmlformats.org/drawingml/2006/chart">
-            <c:chart xmlns:c="http://schemas.openxmlformats.org/drawingml/2006/chart" xmlns:r="http://schemas.openxmlformats.org/officeDocument/2006/relationships" r:id="rId3"/>
-          </a:graphicData>
-        </a:graphic>
-      </p:graphicFrame>
       <p:sp>
         <p:nvSpPr>
           <p:cNvPr id="38" name="Shape 35"/>
@@ -8087,7 +8306,7 @@
                   <a:srgbClr val="1D3557"/>
                 </a:solidFill>
               </a:rPr>
-              <a:t>1.1x</a:t>
+              <a:t>1.0x</a:t>
             </a:r>
             <a:endParaRPr lang="en-US" sz="900" dirty="0"/>
           </a:p>
@@ -8237,8 +8456,8 @@
         </p:nvSpPr>
         <p:spPr>
           <a:xfrm>
-            <a:off x="4498848" y="4480560"/>
-            <a:ext cx="4425696" cy="219456"/>
+            <a:off x="4498848" y="4398264"/>
+            <a:ext cx="4425696" cy="420624"/>
           </a:xfrm>
           <a:prstGeom prst="rect">
             <a:avLst/>
@@ -8291,7 +8510,7 @@
                   <a:srgbClr val="FFFFFF"/>
                 </a:solidFill>
               </a:rPr>
-              <a:t>DOL earns 3x the margin and 2x the ROIC at 3x the growth rate. The premium reflects quality, not speculation. Note: FY2026 EBITDA = $2.39B (EBIT $1.91B + D&amp;A $0.47B); margin dip reflects Reject Shop acquisition mix dilution.</a:t>
+              <a:t>DOL earns 3x the margin and 2x the ROIC at 3x the growth rate. The premium reflects quality, not speculation. Note: FY2026 EBITDA = $2.41B; EBITDA margin = 33.2%; margin dip reflects Reject Shop acquisition mix dilution.</a:t>
             </a:r>
             <a:endParaRPr lang="en-US" sz="800" dirty="0"/>
           </a:p>
@@ -8365,6 +8584,34 @@
           </a:p>
         </p:txBody>
       </p:sp>
+      <p:graphicFrame>
+        <p:nvGraphicFramePr>
+          <p:cNvPr id="9" name="Chart 0">
+            <a:extLst>
+              <a:ext uri="{FF2B5EF4-FFF2-40B4-BE49-F238E27FC236}">
+                <a16:creationId xmlns:a16="http://schemas.microsoft.com/office/drawing/2014/main" id="{60F198D5-7CD5-6E25-1ED3-8FFC61A8ED2E}"/>
+              </a:ext>
+            </a:extLst>
+          </p:cNvPr>
+          <p:cNvGraphicFramePr/>
+          <p:nvPr>
+            <p:extLst>
+              <p:ext uri="{D42A27DB-BD31-4B8C-83A1-F6EECF244321}">
+                <p14:modId xmlns:p14="http://schemas.microsoft.com/office/powerpoint/2010/main" val="1334827322"/>
+              </p:ext>
+            </p:extLst>
+          </p:nvPr>
+        </p:nvGraphicFramePr>
+        <p:xfrm>
+          <a:off x="192024" y="1892808"/>
+          <a:ext cx="4114800" cy="2523744"/>
+        </p:xfrm>
+        <a:graphic>
+          <a:graphicData uri="http://schemas.openxmlformats.org/drawingml/2006/chart">
+            <c:chart xmlns:c="http://schemas.openxmlformats.org/drawingml/2006/chart" xmlns:r="http://schemas.openxmlformats.org/officeDocument/2006/relationships" r:id="rId3"/>
+          </a:graphicData>
+        </a:graphic>
+      </p:graphicFrame>
     </p:spTree>
   </p:cSld>
   <p:clrMapOvr>
@@ -9022,7 +9269,7 @@
                 <a:ea typeface="Georgia" pitchFamily="34" charset="-122"/>
                 <a:cs typeface="Georgia" pitchFamily="34" charset="-120"/>
               </a:rPr>
-              <a:t>0.26</a:t>
+              <a:t>0.37</a:t>
             </a:r>
             <a:endParaRPr lang="en-US" sz="900" dirty="0"/>
           </a:p>
@@ -9612,7 +9859,7 @@
         </p:nvSpPr>
         <p:spPr>
           <a:xfrm>
-            <a:off x="201168" y="2999232"/>
+            <a:off x="253419" y="3007070"/>
             <a:ext cx="2907792" cy="292608"/>
           </a:xfrm>
           <a:prstGeom prst="rect">
@@ -9680,7 +9927,7 @@
         </p:nvSpPr>
         <p:spPr>
           <a:xfrm>
-            <a:off x="1463040" y="3017520"/>
+            <a:off x="1452590" y="3023399"/>
             <a:ext cx="502920" cy="201168"/>
           </a:xfrm>
           <a:prstGeom prst="rect">
@@ -9719,8 +9966,8 @@
         </p:nvSpPr>
         <p:spPr>
           <a:xfrm>
-            <a:off x="1993392" y="3017520"/>
-            <a:ext cx="1042416" cy="201168"/>
+            <a:off x="1965960" y="3017520"/>
+            <a:ext cx="1069848" cy="201168"/>
           </a:xfrm>
           <a:prstGeom prst="rect">
             <a:avLst/>
@@ -9741,7 +9988,7 @@
                   <a:srgbClr val="8AADC8"/>
                 </a:solidFill>
               </a:rPr>
-              <a:t>Conservative vs 6-7% mkt est.</a:t>
+              <a:t>Conservative vs 4-6% mkt est.</a:t>
             </a:r>
             <a:endParaRPr lang="en-US" sz="800" dirty="0"/>
           </a:p>
@@ -12259,12 +12506,36 @@
               <a:buNone/>
             </a:pPr>
             <a:r>
+              <a:rPr lang="en-US" sz="1050" i="1">
+                <a:solidFill>
+                  <a:srgbClr val="FFCCCC"/>
+                </a:solidFill>
+              </a:rPr>
+              <a:t>Tab 09 </a:t>
+            </a:r>
+            <a:r>
               <a:rPr lang="en-US" sz="1050" i="1" dirty="0">
                 <a:solidFill>
                   <a:srgbClr val="FFCCCC"/>
                 </a:solidFill>
               </a:rPr>
-              <a:t>Tab 08 (DCF sliders) + Tab 09 (Monte Carlo)</a:t>
+              <a:t>(DCF sliders) + </a:t>
+            </a:r>
+            <a:r>
+              <a:rPr lang="en-US" sz="1050" i="1">
+                <a:solidFill>
+                  <a:srgbClr val="FFCCCC"/>
+                </a:solidFill>
+              </a:rPr>
+              <a:t>Tab 10 </a:t>
+            </a:r>
+            <a:r>
+              <a:rPr lang="en-US" sz="1050" i="1" dirty="0">
+                <a:solidFill>
+                  <a:srgbClr val="FFCCCC"/>
+                </a:solidFill>
+              </a:rPr>
+              <a:t>(Monte Carlo)</a:t>
             </a:r>
             <a:endParaRPr lang="en-US" sz="1050" dirty="0"/>
           </a:p>
@@ -12888,8 +13159,8 @@
         </p:nvSpPr>
         <p:spPr>
           <a:xfrm>
-            <a:off x="201168" y="3529584"/>
-            <a:ext cx="4187952" cy="1188720"/>
+            <a:off x="219456" y="3529585"/>
+            <a:ext cx="4169664" cy="617220"/>
           </a:xfrm>
           <a:prstGeom prst="rect">
             <a:avLst/>
@@ -12921,7 +13192,7 @@
         <p:spPr>
           <a:xfrm>
             <a:off x="201168" y="3529584"/>
-            <a:ext cx="54864" cy="1188720"/>
+            <a:ext cx="54864" cy="617221"/>
           </a:xfrm>
           <a:prstGeom prst="rect">
             <a:avLst/>
@@ -12988,7 +13259,7 @@
         </p:nvSpPr>
         <p:spPr>
           <a:xfrm>
-            <a:off x="329184" y="3767328"/>
+            <a:off x="329184" y="3520440"/>
             <a:ext cx="3986784" cy="877824"/>
           </a:xfrm>
           <a:prstGeom prst="rect">
@@ -14341,7 +14612,7 @@
                   <a:srgbClr val="E63946"/>
                 </a:solidFill>
               </a:rPr>
-              <a:t>31.1%*</a:t>
+              <a:t>32.9%*</a:t>
             </a:r>
             <a:endParaRPr lang="en-US" sz="850" dirty="0"/>
           </a:p>
@@ -14681,7 +14952,7 @@
                   <a:srgbClr val="E63946"/>
                 </a:solidFill>
               </a:rPr>
-              <a:t>$4.70</a:t>
+              <a:t>$4.76</a:t>
             </a:r>
             <a:endParaRPr lang="en-US" sz="850" dirty="0"/>
           </a:p>
@@ -15021,7 +15292,7 @@
                   <a:srgbClr val="E63946"/>
                 </a:solidFill>
               </a:rPr>
-              <a:t>+12.9%</a:t>
+              <a:t>+14.4%</a:t>
             </a:r>
             <a:endParaRPr lang="en-US" sz="850" dirty="0"/>
           </a:p>
@@ -15361,7 +15632,7 @@
                   <a:srgbClr val="E63946"/>
                 </a:solidFill>
               </a:rPr>
-              <a:t>710E</a:t>
+              <a:t>732</a:t>
             </a:r>
             <a:endParaRPr lang="en-US" sz="850" dirty="0"/>
           </a:p>
@@ -15547,8 +15818,8 @@
         </p:nvSpPr>
         <p:spPr>
           <a:xfrm>
-            <a:off x="201168" y="4114800"/>
-            <a:ext cx="4187952" cy="914400"/>
+            <a:off x="201168" y="4187296"/>
+            <a:ext cx="4187952" cy="659023"/>
           </a:xfrm>
           <a:prstGeom prst="rect">
             <a:avLst/>
@@ -16427,7 +16698,7 @@
                   <a:srgbClr val="1D3557"/>
                 </a:solidFill>
               </a:rPr>
-              <a:t>Monte Carlo + NLP sentiment</a:t>
+              <a:t>NLP sentiment</a:t>
             </a:r>
             <a:endParaRPr lang="en-US" sz="950" dirty="0"/>
           </a:p>
@@ -16463,7 +16734,7 @@
                   <a:srgbClr val="5A6472"/>
                 </a:solidFill>
               </a:rPr>
-              <a:t>Monte Carlo: methodologically sound, 5,000 paths, validated bounds. NLP: polarity scoring on 5 real earnings call transcripts. Both accepted as supplementary, not primary drivers.</a:t>
+              <a:t>NLP: polarity scoring on 5 real earnings call transcripts. Both accepted as supplementary, not primary drivers.</a:t>
             </a:r>
             <a:endParaRPr lang="en-US" sz="800" dirty="0"/>
           </a:p>
